--- a/Tupan_Water_Maker_Pitch.pptx
+++ b/Tupan_Water_Maker_Pitch.pptx
@@ -7065,7 +7065,7 @@
                 <a:latin typeface="Arial"/>
               </a:rPr>
               <a:t>BATERIA 12V 60Ah
-~20h de operação</a:t>
+~8h de operação</a:t>
             </a:r>
           </a:p>
         </p:txBody>
@@ -8561,7 +8561,7 @@
                 </a:solidFill>
                 <a:latin typeface="Arial"/>
               </a:rPr>
-              <a:t>R$ 180</a:t>
+              <a:t>R$ 1.223</a:t>
             </a:r>
           </a:p>
         </p:txBody>
@@ -8596,7 +8596,7 @@
                 </a:solidFill>
                 <a:latin typeface="Arial"/>
               </a:rPr>
-              <a:t>custo estimado</a:t>
+              <a:t>custo do protótipo</a:t>
             </a:r>
           </a:p>
         </p:txBody>
@@ -8701,7 +8701,7 @@
                 </a:solidFill>
                 <a:latin typeface="Arial"/>
               </a:rPr>
-              <a:t>20h</a:t>
+              <a:t>8h</a:t>
             </a:r>
           </a:p>
         </p:txBody>
